--- a/final/장표/Appendix_Tariff.pptx
+++ b/final/장표/Appendix_Tariff.pptx
@@ -502,7 +502,7 @@
           <a:p>
             <a:r>
               <a:rPr lang="en-US" dirty="0"/>
-              <a:t>같은 저주행(2,511km vs 2,474km), 기존 마일리지에서 둘 다 16% 할인. 우리 산식에서 22.6% vs 3%로 갈림. 갈린 이유는 생활권 밖 비중(0% vs 7.3%)과 위험행동(13건 vs 209건)의 동시 변화. 할증 경로 없음, 기준 요율이 하한.</a:t>
+              <a:t>동일 조건 통제 페어: 같은 1951년생, 같은 기본보험료 840,000원(같은 차종), 같은 광역 저밀도 환경, 거리 차 0.1%, 밖 비중도 비슷(28.7 vs 29.6%). 기존 마일리지에서는 둘 다 21% 할인 = 663,600원으로 동일. 다른 것은 위험행동(0건 vs 137건)과 동시변화 여부뿐 → 25.5%(625,968원) vs 8%(772,800원). 핵심 방어: 8%도 할인이다. 할증 경로가 없고 하한은 기준 요율 — 180건 중 기준보험료 초과 0건. 케어 해제(기준선 복귀) 시 할인 복원.</a:t>
             </a:r>
             <a:endParaRPr lang="en-US" dirty="0"/>
           </a:p>
@@ -947,7 +947,7 @@
                 <a:ea typeface="맑은 고딕" pitchFamily="34" charset="-122"/>
                 <a:cs typeface="맑은 고딕" pitchFamily="34" charset="-120"/>
               </a:rPr>
-              <a:t>Q. 거리가 같으면 보험료도 같아야 하는 것 아닌가?</a:t>
+              <a:t>Q. 케어가 열리면 보험료가 오르는 것 아닌가?</a:t>
             </a:r>
             <a:endParaRPr lang="en-US" sz="1350" dirty="0"/>
           </a:p>
@@ -978,7 +978,7 @@
               <a:buNone/>
             </a:pPr>
             <a:r>
-              <a:rPr lang="en-US" sz="2000" b="1" dirty="0">
+              <a:rPr lang="en-US" sz="1900" b="1" dirty="0">
                 <a:solidFill>
                   <a:srgbClr val="1A2330"/>
                 </a:solidFill>
@@ -986,13 +986,13 @@
                 <a:ea typeface="맑은 고딕" pitchFamily="34" charset="-122"/>
                 <a:cs typeface="맑은 고딕" pitchFamily="34" charset="-120"/>
               </a:rPr>
-              <a:t>기존 마일리지에서는 둘 다 16% 할인. </a:t>
-            </a:r>
-            <a:pPr indent="0" marL="0">
-              <a:buNone/>
-            </a:pPr>
-            <a:r>
-              <a:rPr lang="en-US" sz="2000" b="1" dirty="0">
+              <a:t>기존 마일리지로는 둘 다 663,600원 — </a:t>
+            </a:r>
+            <a:pPr indent="0" marL="0">
+              <a:buNone/>
+            </a:pPr>
+            <a:r>
+              <a:rPr lang="en-US" sz="1900" b="1" dirty="0">
                 <a:solidFill>
                   <a:srgbClr val="5B21B6"/>
                 </a:solidFill>
@@ -1000,13 +1000,13 @@
                 <a:ea typeface="맑은 고딕" pitchFamily="34" charset="-122"/>
                 <a:cs typeface="맑은 고딕" pitchFamily="34" charset="-120"/>
               </a:rPr>
-              <a:t>저희 산식에서는 22.6% 와 3%</a:t>
-            </a:r>
-            <a:pPr indent="0" marL="0">
-              <a:buNone/>
-            </a:pPr>
-            <a:r>
-              <a:rPr lang="en-US" sz="2000" b="1" dirty="0">
+              <a:t>행동이 달라 할인 폭이 25.5%와 8%</a:t>
+            </a:r>
+            <a:pPr indent="0" marL="0">
+              <a:buNone/>
+            </a:pPr>
+            <a:r>
+              <a:rPr lang="en-US" sz="1900" b="1" dirty="0">
                 <a:solidFill>
                   <a:srgbClr val="1A2330"/>
                 </a:solidFill>
@@ -1016,7 +1016,7 @@
               </a:rPr>
               <a:t>로 갈립니다.</a:t>
             </a:r>
-            <a:endParaRPr lang="en-US" sz="2000" dirty="0"/>
+            <a:endParaRPr lang="en-US" sz="1900" dirty="0"/>
           </a:p>
         </p:txBody>
       </p:sp>
@@ -1045,7 +1045,7 @@
               <a:buNone/>
             </a:pPr>
             <a:r>
-              <a:rPr lang="en-US" sz="1150" dirty="0">
+              <a:rPr lang="en-US" sz="1100" dirty="0">
                 <a:solidFill>
                   <a:srgbClr val="6B7280"/>
                 </a:solidFill>
@@ -1053,9 +1053,9 @@
                 <a:ea typeface="맑은 고딕" pitchFamily="34" charset="-122"/>
                 <a:cs typeface="맑은 고딕" pitchFamily="34" charset="-120"/>
               </a:rPr>
-              <a:t>연 주행거리가 2,511km와 2,474km로 거의 같은 두 시니어입니다. 갈린 이유는 거리가 아니라 생활권 밖 비중과 위험행동이 함께 변했는지입니다.</a:t>
-            </a:r>
-            <a:endParaRPr lang="en-US" sz="1150" dirty="0"/>
+              <a:t>같은 1951년생 · 같은 차종(기본보험료 84만원) · 같은 광역 저밀도 환경 · 연 주행 6,793km vs 6,789km(차이 0.1%) · 생활권 밖 비중도 28.7% vs 29.6%로 비슷 — 다른 것은 위험행동뿐입니다.</a:t>
+            </a:r>
+            <a:endParaRPr lang="en-US" sz="1100" dirty="0"/>
           </a:p>
         </p:txBody>
       </p:sp>
@@ -1068,11 +1068,11 @@
         <p:spPr>
           <a:xfrm>
             <a:off x="411480" y="1627632"/>
-            <a:ext cx="5650992" cy="3913632"/>
+            <a:ext cx="5650992" cy="4114800"/>
           </a:xfrm>
           <a:prstGeom prst="roundRect">
             <a:avLst>
-              <a:gd name="adj" fmla="val 2336"/>
+              <a:gd name="adj" fmla="val 2222"/>
             </a:avLst>
           </a:prstGeom>
           <a:solidFill>
@@ -1185,7 +1185,7 @@
                 <a:ea typeface="맑은 고딕" pitchFamily="34" charset="-122"/>
                 <a:cs typeface="맑은 고딕" pitchFamily="34" charset="-120"/>
               </a:rPr>
-              <a:t>Ruth Miller (b. 1956)</a:t>
+              <a:t>Kenneth Young (b. 1951)</a:t>
             </a:r>
             <a:endParaRPr lang="en-US" sz="1500" dirty="0"/>
           </a:p>
@@ -1224,7 +1224,7 @@
                 <a:ea typeface="맑은 고딕" pitchFamily="34" charset="-122"/>
                 <a:cs typeface="맑은 고딕" pitchFamily="34" charset="-120"/>
               </a:rPr>
-              <a:t>고밀도 도심 · 복수 생활권형 · 연 2,511km</a:t>
+              <a:t>광역 저밀도 · 이동변화·안전유지형 · 연 6,793km</a:t>
             </a:r>
             <a:endParaRPr lang="en-US" sz="1050" dirty="0"/>
           </a:p>
@@ -1290,7 +1290,7 @@
                 <a:ea typeface="맑은 고딕" pitchFamily="34" charset="-122"/>
                 <a:cs typeface="맑은 고딕" pitchFamily="34" charset="-120"/>
               </a:rPr>
-              <a:t>생활권 밖 비중</a:t>
+              <a:t>위험행동</a:t>
             </a:r>
             <a:endParaRPr lang="en-US" sz="900" dirty="0"/>
           </a:p>
@@ -1329,7 +1329,7 @@
                 <a:ea typeface="맑은 고딕" pitchFamily="34" charset="-122"/>
                 <a:cs typeface="맑은 고딕" pitchFamily="34" charset="-120"/>
               </a:rPr>
-              <a:t>0.0%</a:t>
+              <a:t>0건</a:t>
             </a:r>
             <a:endParaRPr lang="en-US" sz="1300" dirty="0"/>
           </a:p>
@@ -1395,7 +1395,7 @@
                 <a:ea typeface="맑은 고딕" pitchFamily="34" charset="-122"/>
                 <a:cs typeface="맑은 고딕" pitchFamily="34" charset="-120"/>
               </a:rPr>
-              <a:t>위험행동</a:t>
+              <a:t>생활권 밖 비중</a:t>
             </a:r>
             <a:endParaRPr lang="en-US" sz="900" dirty="0"/>
           </a:p>
@@ -1428,13 +1428,13 @@
             <a:r>
               <a:rPr lang="en-US" sz="1300" b="1" dirty="0">
                 <a:solidFill>
-                  <a:srgbClr val="0F766E"/>
-                </a:solidFill>
-                <a:latin typeface="맑은 고딕" pitchFamily="34" charset="0"/>
-                <a:ea typeface="맑은 고딕" pitchFamily="34" charset="-122"/>
-                <a:cs typeface="맑은 고딕" pitchFamily="34" charset="-120"/>
-              </a:rPr>
-              <a:t>13건</a:t>
+                  <a:srgbClr val="1A2330"/>
+                </a:solidFill>
+                <a:latin typeface="맑은 고딕" pitchFamily="34" charset="0"/>
+                <a:ea typeface="맑은 고딕" pitchFamily="34" charset="-122"/>
+                <a:cs typeface="맑은 고딕" pitchFamily="34" charset="-120"/>
+              </a:rPr>
+              <a:t>28.7%</a:t>
             </a:r>
             <a:endParaRPr lang="en-US" sz="1300" dirty="0"/>
           </a:p>
@@ -1545,9 +1545,48 @@
           </a:p>
         </p:txBody>
       </p:sp>
+      <p:sp>
+        <p:nvSpPr>
+          <p:cNvPr id="20" name="Text 18"/>
+          <p:cNvSpPr/>
+          <p:nvPr/>
+        </p:nvSpPr>
+        <p:spPr>
+          <a:xfrm>
+            <a:off x="612648" y="3127248"/>
+            <a:ext cx="5257800" cy="237744"/>
+          </a:xfrm>
+          <a:prstGeom prst="rect">
+            <a:avLst/>
+          </a:prstGeom>
+          <a:noFill/>
+          <a:ln/>
+        </p:spPr>
+        <p:txBody>
+          <a:bodyPr wrap="square" rtlCol="0" anchor="ctr"/>
+          <a:lstStyle/>
+          <a:p>
+            <a:pPr indent="0" marL="0">
+              <a:buNone/>
+            </a:pPr>
+            <a:r>
+              <a:rPr lang="en-US" sz="1050" b="1" dirty="0">
+                <a:solidFill>
+                  <a:srgbClr val="0F766E"/>
+                </a:solidFill>
+                <a:latin typeface="맑은 고딕" pitchFamily="34" charset="0"/>
+                <a:ea typeface="맑은 고딕" pitchFamily="34" charset="-122"/>
+                <a:cs typeface="맑은 고딕" pitchFamily="34" charset="-120"/>
+              </a:rPr>
+              <a:t>할인 확대 21% → 25.5% · 연 ₩37,632 덜 냅니다</a:t>
+            </a:r>
+            <a:endParaRPr lang="en-US" sz="1050" dirty="0"/>
+          </a:p>
+        </p:txBody>
+      </p:sp>
       <p:pic>
         <p:nvPicPr>
-          <p:cNvPr id="20" name="Image 0" descr="/private/tmp/claude-501/-Users-gimdonghyeon-Desktop-seniorcareservice/60c72b2a-4eb8-48cb-9a78-503f6e83abe3/scratchpad/tariff_favorable_ruth.png">    </p:cNvPr>
+          <p:cNvPr id="21" name="Image 0" descr="/private/tmp/claude-501/-Users-gimdonghyeon-Desktop-seniorcareservice/60c72b2a-4eb8-48cb-9a78-503f6e83abe3/scratchpad/tariff_reward_kenneth.png">    </p:cNvPr>
           <p:cNvPicPr>
             <a:picLocks noChangeAspect="1"/>
           </p:cNvPicPr>
@@ -1561,8 +1600,8 @@
         </p:blipFill>
         <p:spPr>
           <a:xfrm>
-            <a:off x="576072" y="3127248"/>
-            <a:ext cx="5321808" cy="1929384"/>
+            <a:off x="576072" y="3419856"/>
+            <a:ext cx="5321808" cy="2057400"/>
           </a:xfrm>
           <a:prstGeom prst="rect">
             <a:avLst/>
@@ -1571,18 +1610,18 @@
       </p:pic>
       <p:sp>
         <p:nvSpPr>
-          <p:cNvPr id="21" name="Shape 18"/>
+          <p:cNvPr id="22" name="Shape 19"/>
           <p:cNvSpPr/>
           <p:nvPr/>
         </p:nvSpPr>
         <p:spPr>
           <a:xfrm>
             <a:off x="6281928" y="1627632"/>
-            <a:ext cx="5650992" cy="3913632"/>
+            <a:ext cx="5650992" cy="4114800"/>
           </a:xfrm>
           <a:prstGeom prst="roundRect">
             <a:avLst>
-              <a:gd name="adj" fmla="val 2336"/>
+              <a:gd name="adj" fmla="val 2222"/>
             </a:avLst>
           </a:prstGeom>
           <a:solidFill>
@@ -1598,7 +1637,7 @@
       </p:sp>
       <p:sp>
         <p:nvSpPr>
-          <p:cNvPr id="22" name="Shape 19"/>
+          <p:cNvPr id="23" name="Shape 20"/>
           <p:cNvSpPr/>
           <p:nvPr/>
         </p:nvSpPr>
@@ -1625,7 +1664,7 @@
       </p:sp>
       <p:sp>
         <p:nvSpPr>
-          <p:cNvPr id="23" name="Text 20"/>
+          <p:cNvPr id="24" name="Text 21"/>
           <p:cNvSpPr/>
           <p:nvPr/>
         </p:nvSpPr>
@@ -1664,7 +1703,7 @@
       </p:sp>
       <p:sp>
         <p:nvSpPr>
-          <p:cNvPr id="24" name="Text 21"/>
+          <p:cNvPr id="25" name="Text 22"/>
           <p:cNvSpPr/>
           <p:nvPr/>
         </p:nvSpPr>
@@ -1695,7 +1734,7 @@
                 <a:ea typeface="맑은 고딕" pitchFamily="34" charset="-122"/>
                 <a:cs typeface="맑은 고딕" pitchFamily="34" charset="-120"/>
               </a:rPr>
-              <a:t>Edward Clark (b. 1953)</a:t>
+              <a:t>Sylvia Moore (b. 1951)</a:t>
             </a:r>
             <a:endParaRPr lang="en-US" sz="1500" dirty="0"/>
           </a:p>
@@ -1703,7 +1742,7 @@
       </p:sp>
       <p:sp>
         <p:nvSpPr>
-          <p:cNvPr id="25" name="Text 22"/>
+          <p:cNvPr id="26" name="Text 23"/>
           <p:cNvSpPr/>
           <p:nvPr/>
         </p:nvSpPr>
@@ -1734,7 +1773,7 @@
                 <a:ea typeface="맑은 고딕" pitchFamily="34" charset="-122"/>
                 <a:cs typeface="맑은 고딕" pitchFamily="34" charset="-120"/>
               </a:rPr>
-              <a:t>고밀도 도심 · 동시변화형 · 연 2,474km</a:t>
+              <a:t>광역 저밀도 · 동시변화형 · 연 6,789km</a:t>
             </a:r>
             <a:endParaRPr lang="en-US" sz="1050" dirty="0"/>
           </a:p>
@@ -1742,7 +1781,7 @@
       </p:sp>
       <p:sp>
         <p:nvSpPr>
-          <p:cNvPr id="26" name="Shape 23"/>
+          <p:cNvPr id="27" name="Shape 24"/>
           <p:cNvSpPr/>
           <p:nvPr/>
         </p:nvSpPr>
@@ -1769,7 +1808,7 @@
       </p:sp>
       <p:sp>
         <p:nvSpPr>
-          <p:cNvPr id="27" name="Text 24"/>
+          <p:cNvPr id="28" name="Text 25"/>
           <p:cNvSpPr/>
           <p:nvPr/>
         </p:nvSpPr>
@@ -1800,7 +1839,7 @@
                 <a:ea typeface="맑은 고딕" pitchFamily="34" charset="-122"/>
                 <a:cs typeface="맑은 고딕" pitchFamily="34" charset="-120"/>
               </a:rPr>
-              <a:t>생활권 밖 비중</a:t>
+              <a:t>위험행동</a:t>
             </a:r>
             <a:endParaRPr lang="en-US" sz="900" dirty="0"/>
           </a:p>
@@ -1808,7 +1847,7 @@
       </p:sp>
       <p:sp>
         <p:nvSpPr>
-          <p:cNvPr id="28" name="Text 25"/>
+          <p:cNvPr id="29" name="Text 26"/>
           <p:cNvSpPr/>
           <p:nvPr/>
         </p:nvSpPr>
@@ -1839,7 +1878,7 @@
                 <a:ea typeface="맑은 고딕" pitchFamily="34" charset="-122"/>
                 <a:cs typeface="맑은 고딕" pitchFamily="34" charset="-120"/>
               </a:rPr>
-              <a:t>7.3%</a:t>
+              <a:t>137건</a:t>
             </a:r>
             <a:endParaRPr lang="en-US" sz="1300" dirty="0"/>
           </a:p>
@@ -1847,7 +1886,7 @@
       </p:sp>
       <p:sp>
         <p:nvSpPr>
-          <p:cNvPr id="29" name="Shape 26"/>
+          <p:cNvPr id="30" name="Shape 27"/>
           <p:cNvSpPr/>
           <p:nvPr/>
         </p:nvSpPr>
@@ -1874,7 +1913,7 @@
       </p:sp>
       <p:sp>
         <p:nvSpPr>
-          <p:cNvPr id="30" name="Text 27"/>
+          <p:cNvPr id="31" name="Text 28"/>
           <p:cNvSpPr/>
           <p:nvPr/>
         </p:nvSpPr>
@@ -1905,7 +1944,7 @@
                 <a:ea typeface="맑은 고딕" pitchFamily="34" charset="-122"/>
                 <a:cs typeface="맑은 고딕" pitchFamily="34" charset="-120"/>
               </a:rPr>
-              <a:t>위험행동</a:t>
+              <a:t>생활권 밖 비중</a:t>
             </a:r>
             <a:endParaRPr lang="en-US" sz="900" dirty="0"/>
           </a:p>
@@ -1913,7 +1952,7 @@
       </p:sp>
       <p:sp>
         <p:nvSpPr>
-          <p:cNvPr id="31" name="Text 28"/>
+          <p:cNvPr id="32" name="Text 29"/>
           <p:cNvSpPr/>
           <p:nvPr/>
         </p:nvSpPr>
@@ -1938,13 +1977,13 @@
             <a:r>
               <a:rPr lang="en-US" sz="1300" b="1" dirty="0">
                 <a:solidFill>
-                  <a:srgbClr val="B45309"/>
-                </a:solidFill>
-                <a:latin typeface="맑은 고딕" pitchFamily="34" charset="0"/>
-                <a:ea typeface="맑은 고딕" pitchFamily="34" charset="-122"/>
-                <a:cs typeface="맑은 고딕" pitchFamily="34" charset="-120"/>
-              </a:rPr>
-              <a:t>209건</a:t>
+                  <a:srgbClr val="1A2330"/>
+                </a:solidFill>
+                <a:latin typeface="맑은 고딕" pitchFamily="34" charset="0"/>
+                <a:ea typeface="맑은 고딕" pitchFamily="34" charset="-122"/>
+                <a:cs typeface="맑은 고딕" pitchFamily="34" charset="-120"/>
+              </a:rPr>
+              <a:t>29.6%</a:t>
             </a:r>
             <a:endParaRPr lang="en-US" sz="1300" dirty="0"/>
           </a:p>
@@ -1952,7 +1991,7 @@
       </p:sp>
       <p:sp>
         <p:nvSpPr>
-          <p:cNvPr id="32" name="Shape 29"/>
+          <p:cNvPr id="33" name="Shape 30"/>
           <p:cNvSpPr/>
           <p:nvPr/>
         </p:nvSpPr>
@@ -1979,7 +2018,7 @@
       </p:sp>
       <p:sp>
         <p:nvSpPr>
-          <p:cNvPr id="33" name="Text 30"/>
+          <p:cNvPr id="34" name="Text 31"/>
           <p:cNvSpPr/>
           <p:nvPr/>
         </p:nvSpPr>
@@ -2018,7 +2057,7 @@
       </p:sp>
       <p:sp>
         <p:nvSpPr>
-          <p:cNvPr id="34" name="Text 31"/>
+          <p:cNvPr id="35" name="Text 32"/>
           <p:cNvSpPr/>
           <p:nvPr/>
         </p:nvSpPr>
@@ -2055,9 +2094,48 @@
           </a:p>
         </p:txBody>
       </p:sp>
+      <p:sp>
+        <p:nvSpPr>
+          <p:cNvPr id="36" name="Text 33"/>
+          <p:cNvSpPr/>
+          <p:nvPr/>
+        </p:nvSpPr>
+        <p:spPr>
+          <a:xfrm>
+            <a:off x="6483096" y="3127248"/>
+            <a:ext cx="5257800" cy="237744"/>
+          </a:xfrm>
+          <a:prstGeom prst="rect">
+            <a:avLst/>
+          </a:prstGeom>
+          <a:noFill/>
+          <a:ln/>
+        </p:spPr>
+        <p:txBody>
+          <a:bodyPr wrap="square" rtlCol="0" anchor="ctr"/>
+          <a:lstStyle/>
+          <a:p>
+            <a:pPr indent="0" marL="0">
+              <a:buNone/>
+            </a:pPr>
+            <a:r>
+              <a:rPr lang="en-US" sz="1050" b="1" dirty="0">
+                <a:solidFill>
+                  <a:srgbClr val="B45309"/>
+                </a:solidFill>
+                <a:latin typeface="맑은 고딕" pitchFamily="34" charset="0"/>
+                <a:ea typeface="맑은 고딕" pitchFamily="34" charset="-122"/>
+                <a:cs typeface="맑은 고딕" pitchFamily="34" charset="-120"/>
+              </a:rPr>
+              <a:t>할인 축소 21% → 8% · 여전히 기준(84만원)보다 낮음</a:t>
+            </a:r>
+            <a:endParaRPr lang="en-US" sz="1050" dirty="0"/>
+          </a:p>
+        </p:txBody>
+      </p:sp>
       <p:pic>
         <p:nvPicPr>
-          <p:cNvPr id="35" name="Image 1" descr="/private/tmp/claude-501/-Users-gimdonghyeon-Desktop-seniorcareservice/60c72b2a-4eb8-48cb-9a78-503f6e83abe3/scratchpad/tariff_care_edward.png">    </p:cNvPr>
+          <p:cNvPr id="37" name="Image 1" descr="/private/tmp/claude-501/-Users-gimdonghyeon-Desktop-seniorcareservice/60c72b2a-4eb8-48cb-9a78-503f6e83abe3/scratchpad/tariff_care_sylvia.png">    </p:cNvPr>
           <p:cNvPicPr>
             <a:picLocks noChangeAspect="1"/>
           </p:cNvPicPr>
@@ -2071,8 +2149,8 @@
         </p:blipFill>
         <p:spPr>
           <a:xfrm>
-            <a:off x="6446520" y="3127248"/>
-            <a:ext cx="5321808" cy="2039112"/>
+            <a:off x="6446520" y="3419856"/>
+            <a:ext cx="5321808" cy="2194560"/>
           </a:xfrm>
           <a:prstGeom prst="rect">
             <a:avLst/>
@@ -2081,13 +2159,13 @@
       </p:pic>
       <p:sp>
         <p:nvSpPr>
-          <p:cNvPr id="36" name="Shape 32"/>
-          <p:cNvSpPr/>
-          <p:nvPr/>
-        </p:nvSpPr>
-        <p:spPr>
-          <a:xfrm>
-            <a:off x="411480" y="5742432"/>
+          <p:cNvPr id="38" name="Shape 34"/>
+          <p:cNvSpPr/>
+          <p:nvPr/>
+        </p:nvSpPr>
+        <p:spPr>
+          <a:xfrm>
+            <a:off x="411480" y="5943600"/>
             <a:ext cx="11338560" cy="512064"/>
           </a:xfrm>
           <a:prstGeom prst="roundRect">
@@ -2108,13 +2186,13 @@
       </p:sp>
       <p:sp>
         <p:nvSpPr>
-          <p:cNvPr id="37" name="Text 33"/>
-          <p:cNvSpPr/>
-          <p:nvPr/>
-        </p:nvSpPr>
-        <p:spPr>
-          <a:xfrm>
-            <a:off x="621792" y="5833872"/>
+          <p:cNvPr id="39" name="Text 35"/>
+          <p:cNvSpPr/>
+          <p:nvPr/>
+        </p:nvSpPr>
+        <p:spPr>
+          <a:xfrm>
+            <a:off x="621792" y="6035040"/>
             <a:ext cx="10927080" cy="347472"/>
           </a:xfrm>
           <a:prstGeom prst="rect">
@@ -2139,7 +2217,7 @@
                 <a:ea typeface="맑은 고딕" pitchFamily="34" charset="-122"/>
                 <a:cs typeface="맑은 고딕" pitchFamily="34" charset="-120"/>
               </a:rPr>
-              <a:t>거리가 아니라 행동입니다 — </a:t>
+              <a:t>할증이 아니라 할인 축소입니다 — </a:t>
             </a:r>
             <a:pPr indent="0" marL="0">
               <a:buNone/>
@@ -2153,21 +2231,7 @@
                 <a:ea typeface="맑은 고딕" pitchFamily="34" charset="-122"/>
                 <a:cs typeface="맑은 고딕" pitchFamily="34" charset="-120"/>
               </a:rPr>
-              <a:t>생활권 안에서 안전하게 다니면 할인이 넓어지고(연 ₩63,648 절약), 이동과 위험행동이 같은 달에 함께 변하면 그 달의 보너스가 멈춥니다(연 ₩106,080 차이). </a:t>
-            </a:r>
-            <a:pPr indent="0" marL="0">
-              <a:buNone/>
-            </a:pPr>
-            <a:r>
-              <a:rPr lang="en-US" sz="1050" b="1" dirty="0">
-                <a:solidFill>
-                  <a:srgbClr val="5B21B6"/>
-                </a:solidFill>
-                <a:latin typeface="맑은 고딕" pitchFamily="34" charset="0"/>
-                <a:ea typeface="맑은 고딕" pitchFamily="34" charset="-122"/>
-                <a:cs typeface="맑은 고딕" pitchFamily="34" charset="-120"/>
-              </a:rPr>
-              <a:t>할증 경로는 없고 기준 요율이 하한입니다.</a:t>
+              <a:t>8%도 할인이며, 어떤 경우에도 보험료가 기준 보험료(84만원)를 넘지 않습니다(180건 중 할증 0건). 케어가 닫히고 기준선으로 복귀하면 할인은 다시 넓어집니다.</a:t>
             </a:r>
             <a:endParaRPr lang="en-US" sz="1050" dirty="0"/>
           </a:p>
@@ -2175,13 +2239,13 @@
       </p:sp>
       <p:sp>
         <p:nvSpPr>
-          <p:cNvPr id="38" name="Text 34"/>
-          <p:cNvSpPr/>
-          <p:nvPr/>
-        </p:nvSpPr>
-        <p:spPr>
-          <a:xfrm>
-            <a:off x="411480" y="6364224"/>
+          <p:cNvPr id="40" name="Text 36"/>
+          <p:cNvSpPr/>
+          <p:nvPr/>
+        </p:nvSpPr>
+        <p:spPr>
+          <a:xfrm>
+            <a:off x="411480" y="6528816"/>
             <a:ext cx="11338560" cy="201168"/>
           </a:xfrm>
           <a:prstGeom prst="rect">
